--- a/praksa/RAST/izradaprezentacije/trash/fresh/AI_nopdf.pptx
+++ b/praksa/RAST/izradaprezentacije/trash/fresh/AI_nopdf.pptx
@@ -5,18 +5,19 @@
     <p:sldMasterId id="2147483648" r:id="rId1"/>
   </p:sldMasterIdLst>
   <p:notesMasterIdLst>
-    <p:notesMasterId r:id="rId11"/>
+    <p:notesMasterId r:id="rId12"/>
   </p:notesMasterIdLst>
   <p:sldIdLst>
     <p:sldId id="256" r:id="rId2"/>
     <p:sldId id="257" r:id="rId3"/>
     <p:sldId id="263" r:id="rId4"/>
-    <p:sldId id="258" r:id="rId5"/>
-    <p:sldId id="264" r:id="rId6"/>
-    <p:sldId id="259" r:id="rId7"/>
-    <p:sldId id="262" r:id="rId8"/>
-    <p:sldId id="260" r:id="rId9"/>
-    <p:sldId id="261" r:id="rId10"/>
+    <p:sldId id="265" r:id="rId5"/>
+    <p:sldId id="258" r:id="rId6"/>
+    <p:sldId id="264" r:id="rId7"/>
+    <p:sldId id="259" r:id="rId8"/>
+    <p:sldId id="262" r:id="rId9"/>
+    <p:sldId id="260" r:id="rId10"/>
+    <p:sldId id="261" r:id="rId11"/>
   </p:sldIdLst>
   <p:sldSz cx="9144000" cy="5143500" type="screen16x9"/>
   <p:notesSz cx="5143500" cy="9144000"/>
@@ -478,7 +479,7 @@
           <a:p>
             <a:fld id="{F7021451-1387-4CA6-816F-3879F97B5CBC}" type="slidenum">
               <a:rPr lang="en-US"/>
-              <a:t>4</a:t>
+              <a:t>5</a:t>
             </a:fld>
             <a:endParaRPr lang="en-US"/>
           </a:p>
@@ -562,7 +563,7 @@
           <a:p>
             <a:fld id="{F7021451-1387-4CA6-816F-3879F97B5CBC}" type="slidenum">
               <a:rPr lang="en-US"/>
-              <a:t>6</a:t>
+              <a:t>7</a:t>
             </a:fld>
             <a:endParaRPr lang="en-US"/>
           </a:p>
@@ -670,7 +671,7 @@
           <a:p>
             <a:fld id="{F7021451-1387-4CA6-816F-3879F97B5CBC}" type="slidenum">
               <a:rPr lang="en-US"/>
-              <a:t>7</a:t>
+              <a:t>8</a:t>
             </a:fld>
             <a:endParaRPr lang="en-US"/>
           </a:p>
@@ -754,7 +755,7 @@
           <a:p>
             <a:fld id="{F7021451-1387-4CA6-816F-3879F97B5CBC}" type="slidenum">
               <a:rPr lang="en-US"/>
-              <a:t>8</a:t>
+              <a:t>9</a:t>
             </a:fld>
             <a:endParaRPr lang="en-US"/>
           </a:p>
@@ -838,7 +839,7 @@
           <a:p>
             <a:fld id="{F7021451-1387-4CA6-816F-3879F97B5CBC}" type="slidenum">
               <a:rPr lang="en-US"/>
-              <a:t>9</a:t>
+              <a:t>10</a:t>
             </a:fld>
             <a:endParaRPr lang="en-US"/>
           </a:p>
@@ -1486,6 +1487,356 @@
 </p:sld>
 </file>
 
+<file path=ppt/slides/slide10.xml><?xml version="1.0" encoding="utf-8"?>
+<p:sld xmlns:a="http://schemas.openxmlformats.org/drawingml/2006/main" xmlns:r="http://schemas.openxmlformats.org/officeDocument/2006/relationships" xmlns:p="http://schemas.openxmlformats.org/presentationml/2006/main">
+  <p:cSld name="Slide 6">
+    <p:bg>
+      <p:bgPr>
+        <a:solidFill>
+          <a:srgbClr val="1B3A5C"/>
+        </a:solidFill>
+        <a:effectLst/>
+      </p:bgPr>
+    </p:bg>
+    <p:spTree>
+      <p:nvGrpSpPr>
+        <p:cNvPr id="1" name=""/>
+        <p:cNvGrpSpPr/>
+        <p:nvPr/>
+      </p:nvGrpSpPr>
+      <p:grpSpPr>
+        <a:xfrm>
+          <a:off x="0" y="0"/>
+          <a:ext cx="0" cy="0"/>
+          <a:chOff x="0" y="0"/>
+          <a:chExt cx="0" cy="0"/>
+        </a:xfrm>
+      </p:grpSpPr>
+      <p:sp>
+        <p:nvSpPr>
+          <p:cNvPr id="2" name="Shape 0"/>
+          <p:cNvSpPr/>
+          <p:nvPr/>
+        </p:nvSpPr>
+        <p:spPr>
+          <a:xfrm>
+            <a:off x="-914400" y="3200400"/>
+            <a:ext cx="4572000" cy="4572000"/>
+          </a:xfrm>
+          <a:prstGeom prst="ellipse">
+            <a:avLst/>
+          </a:prstGeom>
+          <a:solidFill>
+            <a:srgbClr val="2E6DA4">
+              <a:alpha val="30000"/>
+            </a:srgbClr>
+          </a:solidFill>
+          <a:ln w="12700">
+            <a:solidFill>
+              <a:srgbClr val="2E6DA4">
+                <a:alpha val="30000"/>
+              </a:srgbClr>
+            </a:solidFill>
+            <a:prstDash val="solid"/>
+          </a:ln>
+        </p:spPr>
+        <p:txBody>
+          <a:bodyPr/>
+          <a:lstStyle/>
+          <a:p>
+            <a:endParaRPr lang="en-US"/>
+          </a:p>
+        </p:txBody>
+      </p:sp>
+      <p:sp>
+        <p:nvSpPr>
+          <p:cNvPr id="3" name="Shape 1"/>
+          <p:cNvSpPr/>
+          <p:nvPr/>
+        </p:nvSpPr>
+        <p:spPr>
+          <a:xfrm>
+            <a:off x="6858000" y="-914400"/>
+            <a:ext cx="3657600" cy="3657600"/>
+          </a:xfrm>
+          <a:prstGeom prst="ellipse">
+            <a:avLst/>
+          </a:prstGeom>
+          <a:solidFill>
+            <a:srgbClr val="E8A922">
+              <a:alpha val="30000"/>
+            </a:srgbClr>
+          </a:solidFill>
+          <a:ln w="12700">
+            <a:solidFill>
+              <a:srgbClr val="E8A922">
+                <a:alpha val="30000"/>
+              </a:srgbClr>
+            </a:solidFill>
+            <a:prstDash val="solid"/>
+          </a:ln>
+        </p:spPr>
+        <p:txBody>
+          <a:bodyPr/>
+          <a:lstStyle/>
+          <a:p>
+            <a:endParaRPr lang="en-US"/>
+          </a:p>
+        </p:txBody>
+      </p:sp>
+      <p:pic>
+        <p:nvPicPr>
+          <p:cNvPr id="4" name="Image 0" descr="preencoded.png"/>
+          <p:cNvPicPr>
+            <a:picLocks noChangeAspect="1"/>
+          </p:cNvPicPr>
+          <p:nvPr/>
+        </p:nvPicPr>
+        <p:blipFill>
+          <a:blip r:embed="rId3"/>
+          <a:stretch>
+            <a:fillRect/>
+          </a:stretch>
+        </p:blipFill>
+        <p:spPr>
+          <a:xfrm>
+            <a:off x="4114800" y="548640"/>
+            <a:ext cx="822960" cy="822960"/>
+          </a:xfrm>
+          <a:prstGeom prst="rect">
+            <a:avLst/>
+          </a:prstGeom>
+        </p:spPr>
+      </p:pic>
+      <p:sp>
+        <p:nvSpPr>
+          <p:cNvPr id="5" name="Text 2"/>
+          <p:cNvSpPr/>
+          <p:nvPr/>
+        </p:nvSpPr>
+        <p:spPr>
+          <a:xfrm>
+            <a:off x="731520" y="1371600"/>
+            <a:ext cx="7680960" cy="822960"/>
+          </a:xfrm>
+          <a:prstGeom prst="rect">
+            <a:avLst/>
+          </a:prstGeom>
+          <a:noFill/>
+          <a:ln/>
+        </p:spPr>
+        <p:txBody>
+          <a:bodyPr wrap="square" rtlCol="0" anchor="ctr"/>
+          <a:lstStyle/>
+          <a:p>
+            <a:pPr marL="0" indent="0" algn="ctr">
+              <a:buNone/>
+            </a:pPr>
+            <a:r>
+              <a:rPr lang="en-US" sz="4000" b="1" dirty="0">
+                <a:solidFill>
+                  <a:srgbClr val="FFFFFF"/>
+                </a:solidFill>
+                <a:latin typeface="Calibri" pitchFamily="34" charset="0"/>
+                <a:ea typeface="Calibri" pitchFamily="34" charset="-122"/>
+                <a:cs typeface="Calibri" pitchFamily="34" charset="-120"/>
+              </a:rPr>
+              <a:t>AI je tu da vam pomogne!</a:t>
+            </a:r>
+            <a:endParaRPr lang="en-US" sz="4000" dirty="0"/>
+          </a:p>
+        </p:txBody>
+      </p:sp>
+      <p:sp>
+        <p:nvSpPr>
+          <p:cNvPr id="6" name="Text 3"/>
+          <p:cNvSpPr/>
+          <p:nvPr/>
+        </p:nvSpPr>
+        <p:spPr>
+          <a:xfrm>
+            <a:off x="914400" y="2331720"/>
+            <a:ext cx="7315200" cy="1005840"/>
+          </a:xfrm>
+          <a:prstGeom prst="rect">
+            <a:avLst/>
+          </a:prstGeom>
+          <a:noFill/>
+          <a:ln/>
+        </p:spPr>
+        <p:txBody>
+          <a:bodyPr wrap="square" rtlCol="0" anchor="ctr"/>
+          <a:lstStyle/>
+          <a:p>
+            <a:pPr marL="0" indent="0" algn="ctr">
+              <a:buNone/>
+            </a:pPr>
+            <a:r>
+              <a:rPr lang="en-US" sz="2000" i="1" dirty="0">
+                <a:solidFill>
+                  <a:srgbClr val="D6E8F7"/>
+                </a:solidFill>
+                <a:latin typeface="Calibri" pitchFamily="34" charset="0"/>
+                <a:ea typeface="Calibri" pitchFamily="34" charset="-122"/>
+                <a:cs typeface="Calibri" pitchFamily="34" charset="-120"/>
+              </a:rPr>
+              <a:t>Ne morate znati sve odjednom.</a:t>
+            </a:r>
+            <a:endParaRPr lang="en-US" sz="2000" dirty="0"/>
+          </a:p>
+          <a:p>
+            <a:pPr marL="0" indent="0" algn="ctr">
+              <a:buNone/>
+            </a:pPr>
+            <a:r>
+              <a:rPr lang="en-US" sz="2000" i="1" dirty="0">
+                <a:solidFill>
+                  <a:srgbClr val="D6E8F7"/>
+                </a:solidFill>
+                <a:latin typeface="Calibri" pitchFamily="34" charset="0"/>
+                <a:ea typeface="Calibri" pitchFamily="34" charset="-122"/>
+                <a:cs typeface="Calibri" pitchFamily="34" charset="-120"/>
+              </a:rPr>
+              <a:t>Pokušajte jedno pitanje danas — i vidite što se dogodi.</a:t>
+            </a:r>
+            <a:endParaRPr lang="en-US" sz="2000" dirty="0"/>
+          </a:p>
+        </p:txBody>
+      </p:sp>
+      <p:sp>
+        <p:nvSpPr>
+          <p:cNvPr id="7" name="Shape 4"/>
+          <p:cNvSpPr/>
+          <p:nvPr/>
+        </p:nvSpPr>
+        <p:spPr>
+          <a:xfrm>
+            <a:off x="2011680" y="3520440"/>
+            <a:ext cx="5120640" cy="868680"/>
+          </a:xfrm>
+          <a:prstGeom prst="rect">
+            <a:avLst/>
+          </a:prstGeom>
+          <a:solidFill>
+            <a:srgbClr val="E8A922"/>
+          </a:solidFill>
+          <a:ln w="12700">
+            <a:solidFill>
+              <a:srgbClr val="E8A922"/>
+            </a:solidFill>
+            <a:prstDash val="solid"/>
+          </a:ln>
+        </p:spPr>
+        <p:txBody>
+          <a:bodyPr/>
+          <a:lstStyle/>
+          <a:p>
+            <a:endParaRPr lang="en-US"/>
+          </a:p>
+        </p:txBody>
+      </p:sp>
+      <p:sp>
+        <p:nvSpPr>
+          <p:cNvPr id="8" name="Text 5"/>
+          <p:cNvSpPr/>
+          <p:nvPr/>
+        </p:nvSpPr>
+        <p:spPr>
+          <a:xfrm>
+            <a:off x="2011680" y="3566160"/>
+            <a:ext cx="5120640" cy="777240"/>
+          </a:xfrm>
+          <a:prstGeom prst="rect">
+            <a:avLst/>
+          </a:prstGeom>
+          <a:noFill/>
+          <a:ln/>
+        </p:spPr>
+        <p:txBody>
+          <a:bodyPr wrap="square" rtlCol="0" anchor="ctr"/>
+          <a:lstStyle/>
+          <a:p>
+            <a:pPr marL="0" indent="0" algn="ctr">
+              <a:buNone/>
+            </a:pPr>
+            <a:r>
+              <a:rPr lang="en-US" sz="2000" b="1" dirty="0">
+                <a:solidFill>
+                  <a:srgbClr val="1B3A5C"/>
+                </a:solidFill>
+                <a:latin typeface="Calibri" pitchFamily="34" charset="0"/>
+                <a:ea typeface="Calibri" pitchFamily="34" charset="-122"/>
+                <a:cs typeface="Calibri" pitchFamily="34" charset="-120"/>
+              </a:rPr>
+              <a:t>Probajte: chatgpt.com  ili  claude.ai</a:t>
+            </a:r>
+          </a:p>
+          <a:p>
+            <a:pPr marL="0" indent="0" algn="ctr">
+              <a:buNone/>
+            </a:pPr>
+            <a:r>
+              <a:rPr lang="en-US" sz="2000" b="1" dirty="0" err="1">
+                <a:solidFill>
+                  <a:srgbClr val="1B3A5C"/>
+                </a:solidFill>
+                <a:latin typeface="Calibri" pitchFamily="34" charset="0"/>
+                <a:ea typeface="Calibri" pitchFamily="34" charset="-122"/>
+                <a:cs typeface="Calibri" pitchFamily="34" charset="-120"/>
+              </a:rPr>
+              <a:t>Aplikacija</a:t>
+            </a:r>
+            <a:endParaRPr lang="en-US" sz="2000" dirty="0"/>
+          </a:p>
+        </p:txBody>
+      </p:sp>
+      <p:sp>
+        <p:nvSpPr>
+          <p:cNvPr id="9" name="Text 6"/>
+          <p:cNvSpPr/>
+          <p:nvPr/>
+        </p:nvSpPr>
+        <p:spPr>
+          <a:xfrm>
+            <a:off x="457200" y="4572000"/>
+            <a:ext cx="8229600" cy="457200"/>
+          </a:xfrm>
+          <a:prstGeom prst="rect">
+            <a:avLst/>
+          </a:prstGeom>
+          <a:noFill/>
+          <a:ln/>
+        </p:spPr>
+        <p:txBody>
+          <a:bodyPr wrap="square" rtlCol="0" anchor="ctr"/>
+          <a:lstStyle/>
+          <a:p>
+            <a:pPr marL="0" indent="0" algn="ctr">
+              <a:buNone/>
+            </a:pPr>
+            <a:r>
+              <a:rPr lang="en-US" sz="1600" dirty="0">
+                <a:solidFill>
+                  <a:srgbClr val="E8A922"/>
+                </a:solidFill>
+                <a:latin typeface="Calibri" pitchFamily="34" charset="0"/>
+                <a:ea typeface="Calibri" pitchFamily="34" charset="-122"/>
+                <a:cs typeface="Calibri" pitchFamily="34" charset="-120"/>
+              </a:rPr>
+              <a:t>Pitanja? Slobodno pitajte!</a:t>
+            </a:r>
+            <a:endParaRPr lang="en-US" sz="1600" dirty="0"/>
+          </a:p>
+        </p:txBody>
+      </p:sp>
+    </p:spTree>
+  </p:cSld>
+  <p:clrMapOvr>
+    <a:masterClrMapping/>
+  </p:clrMapOvr>
+</p:sld>
+</file>
+
 <file path=ppt/slides/slide2.xml><?xml version="1.0" encoding="utf-8"?>
 <p:sld xmlns:a="http://schemas.openxmlformats.org/drawingml/2006/main" xmlns:r="http://schemas.openxmlformats.org/officeDocument/2006/relationships" xmlns:p="http://schemas.openxmlformats.org/presentationml/2006/main">
   <p:cSld name="Slide 2">
@@ -2560,6 +2911,435 @@
 
 <file path=ppt/slides/slide4.xml><?xml version="1.0" encoding="utf-8"?>
 <p:sld xmlns:a="http://schemas.openxmlformats.org/drawingml/2006/main" xmlns:r="http://schemas.openxmlformats.org/officeDocument/2006/relationships" xmlns:p="http://schemas.openxmlformats.org/presentationml/2006/main">
+  <p:cSld>
+    <p:spTree>
+      <p:nvGrpSpPr>
+        <p:cNvPr id="1" name="">
+          <a:extLst>
+            <a:ext uri="{FF2B5EF4-FFF2-40B4-BE49-F238E27FC236}">
+              <a16:creationId xmlns:a16="http://schemas.microsoft.com/office/drawing/2014/main" id="{894A7AE5-03BA-2654-2DCC-948F4173D5A2}"/>
+            </a:ext>
+          </a:extLst>
+        </p:cNvPr>
+        <p:cNvGrpSpPr/>
+        <p:nvPr/>
+      </p:nvGrpSpPr>
+      <p:grpSpPr>
+        <a:xfrm>
+          <a:off x="0" y="0"/>
+          <a:ext cx="0" cy="0"/>
+          <a:chOff x="0" y="0"/>
+          <a:chExt cx="0" cy="0"/>
+        </a:xfrm>
+      </p:grpSpPr>
+      <p:pic>
+        <p:nvPicPr>
+          <p:cNvPr id="3" name="Picture 2">
+            <a:extLst>
+              <a:ext uri="{FF2B5EF4-FFF2-40B4-BE49-F238E27FC236}">
+                <a16:creationId xmlns:a16="http://schemas.microsoft.com/office/drawing/2014/main" id="{ED3AC0B9-B3DB-5156-E439-0E74E192B6F4}"/>
+              </a:ext>
+            </a:extLst>
+          </p:cNvPr>
+          <p:cNvPicPr>
+            <a:picLocks noChangeAspect="1"/>
+          </p:cNvPicPr>
+          <p:nvPr/>
+        </p:nvPicPr>
+        <p:blipFill>
+          <a:blip r:embed="rId2"/>
+          <a:stretch>
+            <a:fillRect/>
+          </a:stretch>
+        </p:blipFill>
+        <p:spPr>
+          <a:xfrm>
+            <a:off x="1439343" y="323804"/>
+            <a:ext cx="5532375" cy="1630544"/>
+          </a:xfrm>
+          <a:prstGeom prst="rect">
+            <a:avLst/>
+          </a:prstGeom>
+          <a:solidFill>
+            <a:srgbClr val="FFFFFF">
+              <a:shade val="85000"/>
+            </a:srgbClr>
+          </a:solidFill>
+          <a:ln w="190500" cap="sq">
+            <a:solidFill>
+              <a:srgbClr val="FFFFFF"/>
+            </a:solidFill>
+            <a:miter lim="800000"/>
+          </a:ln>
+          <a:effectLst>
+            <a:outerShdw blurRad="65000" dist="50800" dir="12900000" kx="195000" ky="145000" algn="tl" rotWithShape="0">
+              <a:srgbClr val="000000">
+                <a:alpha val="30000"/>
+              </a:srgbClr>
+            </a:outerShdw>
+          </a:effectLst>
+          <a:scene3d>
+            <a:camera prst="orthographicFront">
+              <a:rot lat="0" lon="0" rev="360000"/>
+            </a:camera>
+            <a:lightRig rig="twoPt" dir="t">
+              <a:rot lat="0" lon="0" rev="7200000"/>
+            </a:lightRig>
+          </a:scene3d>
+          <a:sp3d contourW="12700">
+            <a:bevelT w="25400" h="19050"/>
+            <a:contourClr>
+              <a:srgbClr val="969696"/>
+            </a:contourClr>
+          </a:sp3d>
+        </p:spPr>
+      </p:pic>
+      <p:pic>
+        <p:nvPicPr>
+          <p:cNvPr id="7" name="Graphic 6" descr="Wave Gesture outline">
+            <a:extLst>
+              <a:ext uri="{FF2B5EF4-FFF2-40B4-BE49-F238E27FC236}">
+                <a16:creationId xmlns:a16="http://schemas.microsoft.com/office/drawing/2014/main" id="{9E7967F8-F45B-E87A-BCE0-E14746937CC6}"/>
+              </a:ext>
+            </a:extLst>
+          </p:cNvPr>
+          <p:cNvPicPr>
+            <a:picLocks noChangeAspect="1"/>
+          </p:cNvPicPr>
+          <p:nvPr/>
+        </p:nvPicPr>
+        <p:blipFill>
+          <a:blip>
+            <a:extLst>
+              <a:ext uri="{96DAC541-7B7A-43D3-8B79-37D633B846F1}">
+                <asvg:svgBlip xmlns:asvg="http://schemas.microsoft.com/office/drawing/2016/SVG/main" r:embed="rId3"/>
+              </a:ext>
+            </a:extLst>
+          </a:blip>
+          <a:stretch>
+            <a:fillRect/>
+          </a:stretch>
+        </p:blipFill>
+        <p:spPr>
+          <a:xfrm>
+            <a:off x="2038886" y="1881655"/>
+            <a:ext cx="914400" cy="914400"/>
+          </a:xfrm>
+          <a:prstGeom prst="rect">
+            <a:avLst/>
+          </a:prstGeom>
+        </p:spPr>
+      </p:pic>
+      <p:sp>
+        <p:nvSpPr>
+          <p:cNvPr id="5" name="Rectangle 4">
+            <a:extLst>
+              <a:ext uri="{FF2B5EF4-FFF2-40B4-BE49-F238E27FC236}">
+                <a16:creationId xmlns:a16="http://schemas.microsoft.com/office/drawing/2014/main" id="{91A09ECA-5FD1-363F-2F25-012C896FD358}"/>
+              </a:ext>
+            </a:extLst>
+          </p:cNvPr>
+          <p:cNvSpPr/>
+          <p:nvPr/>
+        </p:nvSpPr>
+        <p:spPr>
+          <a:xfrm rot="6076246">
+            <a:off x="3236748" y="2086630"/>
+            <a:ext cx="174674" cy="1418851"/>
+          </a:xfrm>
+          <a:prstGeom prst="rect">
+            <a:avLst/>
+          </a:prstGeom>
+          <a:solidFill>
+            <a:schemeClr val="bg2"/>
+          </a:solidFill>
+          <a:ln>
+            <a:solidFill>
+              <a:schemeClr val="tx1">
+                <a:lumMod val="65000"/>
+                <a:lumOff val="35000"/>
+              </a:schemeClr>
+            </a:solidFill>
+          </a:ln>
+        </p:spPr>
+        <p:style>
+          <a:lnRef idx="2">
+            <a:schemeClr val="accent1">
+              <a:shade val="15000"/>
+            </a:schemeClr>
+          </a:lnRef>
+          <a:fillRef idx="1">
+            <a:schemeClr val="accent1"/>
+          </a:fillRef>
+          <a:effectRef idx="0">
+            <a:schemeClr val="accent1"/>
+          </a:effectRef>
+          <a:fontRef idx="minor">
+            <a:schemeClr val="lt1"/>
+          </a:fontRef>
+        </p:style>
+        <p:txBody>
+          <a:bodyPr rtlCol="0" anchor="ctr"/>
+          <a:lstStyle/>
+          <a:p>
+            <a:pPr algn="ctr"/>
+            <a:endParaRPr lang="en-US"/>
+          </a:p>
+        </p:txBody>
+      </p:sp>
+      <p:sp>
+        <p:nvSpPr>
+          <p:cNvPr id="4" name="Rectangle 3">
+            <a:extLst>
+              <a:ext uri="{FF2B5EF4-FFF2-40B4-BE49-F238E27FC236}">
+                <a16:creationId xmlns:a16="http://schemas.microsoft.com/office/drawing/2014/main" id="{009B60AD-0DD4-6C83-6391-4357B6E52343}"/>
+              </a:ext>
+            </a:extLst>
+          </p:cNvPr>
+          <p:cNvSpPr/>
+          <p:nvPr/>
+        </p:nvSpPr>
+        <p:spPr>
+          <a:xfrm rot="21222773">
+            <a:off x="4060390" y="2050828"/>
+            <a:ext cx="391235" cy="2900817"/>
+          </a:xfrm>
+          <a:prstGeom prst="rect">
+            <a:avLst/>
+          </a:prstGeom>
+          <a:solidFill>
+            <a:schemeClr val="bg2"/>
+          </a:solidFill>
+          <a:ln>
+            <a:solidFill>
+              <a:schemeClr val="tx1">
+                <a:lumMod val="65000"/>
+                <a:lumOff val="35000"/>
+              </a:schemeClr>
+            </a:solidFill>
+          </a:ln>
+        </p:spPr>
+        <p:style>
+          <a:lnRef idx="2">
+            <a:schemeClr val="accent1">
+              <a:shade val="15000"/>
+            </a:schemeClr>
+          </a:lnRef>
+          <a:fillRef idx="1">
+            <a:schemeClr val="accent1"/>
+          </a:fillRef>
+          <a:effectRef idx="0">
+            <a:schemeClr val="accent1"/>
+          </a:effectRef>
+          <a:fontRef idx="minor">
+            <a:schemeClr val="lt1"/>
+          </a:fontRef>
+        </p:style>
+        <p:txBody>
+          <a:bodyPr rtlCol="0" anchor="ctr"/>
+          <a:lstStyle/>
+          <a:p>
+            <a:pPr algn="ctr"/>
+            <a:endParaRPr lang="en-US"/>
+          </a:p>
+        </p:txBody>
+      </p:sp>
+      <p:pic>
+        <p:nvPicPr>
+          <p:cNvPr id="8" name="Graphic 7" descr="Wave Gesture outline">
+            <a:extLst>
+              <a:ext uri="{FF2B5EF4-FFF2-40B4-BE49-F238E27FC236}">
+                <a16:creationId xmlns:a16="http://schemas.microsoft.com/office/drawing/2014/main" id="{B0BF7C46-CDE7-D9E7-D2C7-860B6DC09648}"/>
+              </a:ext>
+            </a:extLst>
+          </p:cNvPr>
+          <p:cNvPicPr>
+            <a:picLocks noChangeAspect="1"/>
+          </p:cNvPicPr>
+          <p:nvPr/>
+        </p:nvPicPr>
+        <p:blipFill>
+          <a:blip>
+            <a:extLst>
+              <a:ext uri="{96DAC541-7B7A-43D3-8B79-37D633B846F1}">
+                <asvg:svgBlip xmlns:asvg="http://schemas.microsoft.com/office/drawing/2016/SVG/main" r:embed="rId3"/>
+              </a:ext>
+            </a:extLst>
+          </a:blip>
+          <a:stretch>
+            <a:fillRect/>
+          </a:stretch>
+        </p:blipFill>
+        <p:spPr>
+          <a:xfrm rot="1548987" flipH="1">
+            <a:off x="5537805" y="2480996"/>
+            <a:ext cx="862355" cy="914400"/>
+          </a:xfrm>
+          <a:prstGeom prst="rect">
+            <a:avLst/>
+          </a:prstGeom>
+        </p:spPr>
+      </p:pic>
+      <p:sp>
+        <p:nvSpPr>
+          <p:cNvPr id="9" name="Rectangle 8">
+            <a:extLst>
+              <a:ext uri="{FF2B5EF4-FFF2-40B4-BE49-F238E27FC236}">
+                <a16:creationId xmlns:a16="http://schemas.microsoft.com/office/drawing/2014/main" id="{F40E0E36-7052-3952-8B8F-0A1AE5C90944}"/>
+              </a:ext>
+            </a:extLst>
+          </p:cNvPr>
+          <p:cNvSpPr/>
+          <p:nvPr/>
+        </p:nvSpPr>
+        <p:spPr>
+          <a:xfrm rot="6076246">
+            <a:off x="4949082" y="2307806"/>
+            <a:ext cx="174674" cy="1418851"/>
+          </a:xfrm>
+          <a:prstGeom prst="rect">
+            <a:avLst/>
+          </a:prstGeom>
+          <a:solidFill>
+            <a:schemeClr val="bg2"/>
+          </a:solidFill>
+          <a:ln>
+            <a:solidFill>
+              <a:schemeClr val="tx1">
+                <a:lumMod val="65000"/>
+                <a:lumOff val="35000"/>
+              </a:schemeClr>
+            </a:solidFill>
+          </a:ln>
+        </p:spPr>
+        <p:style>
+          <a:lnRef idx="2">
+            <a:schemeClr val="accent1">
+              <a:shade val="15000"/>
+            </a:schemeClr>
+          </a:lnRef>
+          <a:fillRef idx="1">
+            <a:schemeClr val="accent1"/>
+          </a:fillRef>
+          <a:effectRef idx="0">
+            <a:schemeClr val="accent1"/>
+          </a:effectRef>
+          <a:fontRef idx="minor">
+            <a:schemeClr val="lt1"/>
+          </a:fontRef>
+        </p:style>
+        <p:txBody>
+          <a:bodyPr rtlCol="0" anchor="ctr"/>
+          <a:lstStyle/>
+          <a:p>
+            <a:pPr algn="ctr"/>
+            <a:endParaRPr lang="en-US"/>
+          </a:p>
+        </p:txBody>
+      </p:sp>
+      <p:sp>
+        <p:nvSpPr>
+          <p:cNvPr id="6" name="TextBox 5">
+            <a:extLst>
+              <a:ext uri="{FF2B5EF4-FFF2-40B4-BE49-F238E27FC236}">
+                <a16:creationId xmlns:a16="http://schemas.microsoft.com/office/drawing/2014/main" id="{1B5F1636-2C34-ABEF-3225-EFB5272DA51F}"/>
+              </a:ext>
+            </a:extLst>
+          </p:cNvPr>
+          <p:cNvSpPr txBox="1"/>
+          <p:nvPr/>
+        </p:nvSpPr>
+        <p:spPr>
+          <a:xfrm>
+            <a:off x="5805334" y="4159553"/>
+            <a:ext cx="2026517" cy="338554"/>
+          </a:xfrm>
+          <a:prstGeom prst="rect">
+            <a:avLst/>
+          </a:prstGeom>
+          <a:noFill/>
+        </p:spPr>
+        <p:txBody>
+          <a:bodyPr wrap="none" rtlCol="0">
+            <a:spAutoFit/>
+          </a:bodyPr>
+          <a:lstStyle/>
+          <a:p>
+            <a:r>
+              <a:rPr lang="en-US" sz="1600" i="1" dirty="0">
+                <a:solidFill>
+                  <a:schemeClr val="tx1">
+                    <a:lumMod val="65000"/>
+                    <a:lumOff val="35000"/>
+                  </a:schemeClr>
+                </a:solidFill>
+                <a:ea typeface="ADLaM Display" panose="020F0502020204030204" pitchFamily="2" charset="0"/>
+                <a:cs typeface="ADLaM Display" panose="020F0502020204030204" pitchFamily="2" charset="0"/>
+              </a:rPr>
+              <a:t>CHAT GPT RAZGOVOR</a:t>
+            </a:r>
+          </a:p>
+        </p:txBody>
+      </p:sp>
+      <p:sp>
+        <p:nvSpPr>
+          <p:cNvPr id="10" name="TextBox 9">
+            <a:extLst>
+              <a:ext uri="{FF2B5EF4-FFF2-40B4-BE49-F238E27FC236}">
+                <a16:creationId xmlns:a16="http://schemas.microsoft.com/office/drawing/2014/main" id="{DBA7CD51-8D71-EA5B-7EA5-4A95AC11DD56}"/>
+              </a:ext>
+            </a:extLst>
+          </p:cNvPr>
+          <p:cNvSpPr txBox="1"/>
+          <p:nvPr/>
+        </p:nvSpPr>
+        <p:spPr>
+          <a:xfrm>
+            <a:off x="6471414" y="4498107"/>
+            <a:ext cx="1199303" cy="307777"/>
+          </a:xfrm>
+          <a:prstGeom prst="rect">
+            <a:avLst/>
+          </a:prstGeom>
+          <a:noFill/>
+        </p:spPr>
+        <p:txBody>
+          <a:bodyPr wrap="none" rtlCol="0">
+            <a:spAutoFit/>
+          </a:bodyPr>
+          <a:lstStyle/>
+          <a:p>
+            <a:r>
+              <a:rPr lang="en-US" sz="1400" i="1" dirty="0">
+                <a:solidFill>
+                  <a:schemeClr val="tx1">
+                    <a:lumMod val="65000"/>
+                    <a:lumOff val="35000"/>
+                  </a:schemeClr>
+                </a:solidFill>
+                <a:ea typeface="ADLaM Display" panose="020F0502020204030204" pitchFamily="2" charset="0"/>
+                <a:cs typeface="ADLaM Display" panose="020F0502020204030204" pitchFamily="2" charset="0"/>
+              </a:rPr>
+              <a:t>KAO ČOVJEK…</a:t>
+            </a:r>
+          </a:p>
+        </p:txBody>
+      </p:sp>
+    </p:spTree>
+    <p:extLst>
+      <p:ext uri="{BB962C8B-B14F-4D97-AF65-F5344CB8AC3E}">
+        <p14:creationId xmlns:p14="http://schemas.microsoft.com/office/powerpoint/2010/main" val="1169597192"/>
+      </p:ext>
+    </p:extLst>
+  </p:cSld>
+  <p:clrMapOvr>
+    <a:masterClrMapping/>
+  </p:clrMapOvr>
+</p:sld>
+</file>
+
+<file path=ppt/slides/slide5.xml><?xml version="1.0" encoding="utf-8"?>
+<p:sld xmlns:a="http://schemas.openxmlformats.org/drawingml/2006/main" xmlns:r="http://schemas.openxmlformats.org/officeDocument/2006/relationships" xmlns:p="http://schemas.openxmlformats.org/presentationml/2006/main">
   <p:cSld name="Slide 3">
     <p:bg>
       <p:bgPr>
@@ -3563,7 +4343,7 @@
 </p:sld>
 </file>
 
-<file path=ppt/slides/slide5.xml><?xml version="1.0" encoding="utf-8"?>
+<file path=ppt/slides/slide6.xml><?xml version="1.0" encoding="utf-8"?>
 <p:sld xmlns:a="http://schemas.openxmlformats.org/drawingml/2006/main" xmlns:r="http://schemas.openxmlformats.org/officeDocument/2006/relationships" xmlns:p="http://schemas.openxmlformats.org/presentationml/2006/main">
   <p:cSld>
     <p:spTree>
@@ -5463,7 +6243,7 @@
 </p:sld>
 </file>
 
-<file path=ppt/slides/slide6.xml><?xml version="1.0" encoding="utf-8"?>
+<file path=ppt/slides/slide7.xml><?xml version="1.0" encoding="utf-8"?>
 <p:sld xmlns:a="http://schemas.openxmlformats.org/drawingml/2006/main" xmlns:r="http://schemas.openxmlformats.org/officeDocument/2006/relationships" xmlns:p="http://schemas.openxmlformats.org/presentationml/2006/main">
   <p:cSld name="Slide 4">
     <p:bg>
@@ -6337,7 +7117,7 @@
 </p:sld>
 </file>
 
-<file path=ppt/slides/slide7.xml><?xml version="1.0" encoding="utf-8"?>
+<file path=ppt/slides/slide8.xml><?xml version="1.0" encoding="utf-8"?>
 <p:sld xmlns:a="http://schemas.openxmlformats.org/drawingml/2006/main" xmlns:r="http://schemas.openxmlformats.org/officeDocument/2006/relationships" xmlns:p="http://schemas.openxmlformats.org/presentationml/2006/main">
   <p:cSld>
     <p:spTree>
@@ -7683,7 +8463,7 @@
 </p:sld>
 </file>
 
-<file path=ppt/slides/slide8.xml><?xml version="1.0" encoding="utf-8"?>
+<file path=ppt/slides/slide9.xml><?xml version="1.0" encoding="utf-8"?>
 <p:sld xmlns:a="http://schemas.openxmlformats.org/drawingml/2006/main" xmlns:r="http://schemas.openxmlformats.org/officeDocument/2006/relationships" xmlns:p="http://schemas.openxmlformats.org/presentationml/2006/main">
   <p:cSld name="Slide 5">
     <p:bg>
@@ -8543,356 +9323,6 @@
               <a:t>Koristite samo poznate i provjerene stranice</a:t>
             </a:r>
             <a:endParaRPr lang="en-US" sz="1400" dirty="0"/>
-          </a:p>
-        </p:txBody>
-      </p:sp>
-    </p:spTree>
-  </p:cSld>
-  <p:clrMapOvr>
-    <a:masterClrMapping/>
-  </p:clrMapOvr>
-</p:sld>
-</file>
-
-<file path=ppt/slides/slide9.xml><?xml version="1.0" encoding="utf-8"?>
-<p:sld xmlns:a="http://schemas.openxmlformats.org/drawingml/2006/main" xmlns:r="http://schemas.openxmlformats.org/officeDocument/2006/relationships" xmlns:p="http://schemas.openxmlformats.org/presentationml/2006/main">
-  <p:cSld name="Slide 6">
-    <p:bg>
-      <p:bgPr>
-        <a:solidFill>
-          <a:srgbClr val="1B3A5C"/>
-        </a:solidFill>
-        <a:effectLst/>
-      </p:bgPr>
-    </p:bg>
-    <p:spTree>
-      <p:nvGrpSpPr>
-        <p:cNvPr id="1" name=""/>
-        <p:cNvGrpSpPr/>
-        <p:nvPr/>
-      </p:nvGrpSpPr>
-      <p:grpSpPr>
-        <a:xfrm>
-          <a:off x="0" y="0"/>
-          <a:ext cx="0" cy="0"/>
-          <a:chOff x="0" y="0"/>
-          <a:chExt cx="0" cy="0"/>
-        </a:xfrm>
-      </p:grpSpPr>
-      <p:sp>
-        <p:nvSpPr>
-          <p:cNvPr id="2" name="Shape 0"/>
-          <p:cNvSpPr/>
-          <p:nvPr/>
-        </p:nvSpPr>
-        <p:spPr>
-          <a:xfrm>
-            <a:off x="-914400" y="3200400"/>
-            <a:ext cx="4572000" cy="4572000"/>
-          </a:xfrm>
-          <a:prstGeom prst="ellipse">
-            <a:avLst/>
-          </a:prstGeom>
-          <a:solidFill>
-            <a:srgbClr val="2E6DA4">
-              <a:alpha val="30000"/>
-            </a:srgbClr>
-          </a:solidFill>
-          <a:ln w="12700">
-            <a:solidFill>
-              <a:srgbClr val="2E6DA4">
-                <a:alpha val="30000"/>
-              </a:srgbClr>
-            </a:solidFill>
-            <a:prstDash val="solid"/>
-          </a:ln>
-        </p:spPr>
-        <p:txBody>
-          <a:bodyPr/>
-          <a:lstStyle/>
-          <a:p>
-            <a:endParaRPr lang="en-US"/>
-          </a:p>
-        </p:txBody>
-      </p:sp>
-      <p:sp>
-        <p:nvSpPr>
-          <p:cNvPr id="3" name="Shape 1"/>
-          <p:cNvSpPr/>
-          <p:nvPr/>
-        </p:nvSpPr>
-        <p:spPr>
-          <a:xfrm>
-            <a:off x="6858000" y="-914400"/>
-            <a:ext cx="3657600" cy="3657600"/>
-          </a:xfrm>
-          <a:prstGeom prst="ellipse">
-            <a:avLst/>
-          </a:prstGeom>
-          <a:solidFill>
-            <a:srgbClr val="E8A922">
-              <a:alpha val="30000"/>
-            </a:srgbClr>
-          </a:solidFill>
-          <a:ln w="12700">
-            <a:solidFill>
-              <a:srgbClr val="E8A922">
-                <a:alpha val="30000"/>
-              </a:srgbClr>
-            </a:solidFill>
-            <a:prstDash val="solid"/>
-          </a:ln>
-        </p:spPr>
-        <p:txBody>
-          <a:bodyPr/>
-          <a:lstStyle/>
-          <a:p>
-            <a:endParaRPr lang="en-US"/>
-          </a:p>
-        </p:txBody>
-      </p:sp>
-      <p:pic>
-        <p:nvPicPr>
-          <p:cNvPr id="4" name="Image 0" descr="preencoded.png"/>
-          <p:cNvPicPr>
-            <a:picLocks noChangeAspect="1"/>
-          </p:cNvPicPr>
-          <p:nvPr/>
-        </p:nvPicPr>
-        <p:blipFill>
-          <a:blip r:embed="rId3"/>
-          <a:stretch>
-            <a:fillRect/>
-          </a:stretch>
-        </p:blipFill>
-        <p:spPr>
-          <a:xfrm>
-            <a:off x="4114800" y="548640"/>
-            <a:ext cx="822960" cy="822960"/>
-          </a:xfrm>
-          <a:prstGeom prst="rect">
-            <a:avLst/>
-          </a:prstGeom>
-        </p:spPr>
-      </p:pic>
-      <p:sp>
-        <p:nvSpPr>
-          <p:cNvPr id="5" name="Text 2"/>
-          <p:cNvSpPr/>
-          <p:nvPr/>
-        </p:nvSpPr>
-        <p:spPr>
-          <a:xfrm>
-            <a:off x="731520" y="1371600"/>
-            <a:ext cx="7680960" cy="822960"/>
-          </a:xfrm>
-          <a:prstGeom prst="rect">
-            <a:avLst/>
-          </a:prstGeom>
-          <a:noFill/>
-          <a:ln/>
-        </p:spPr>
-        <p:txBody>
-          <a:bodyPr wrap="square" rtlCol="0" anchor="ctr"/>
-          <a:lstStyle/>
-          <a:p>
-            <a:pPr marL="0" indent="0" algn="ctr">
-              <a:buNone/>
-            </a:pPr>
-            <a:r>
-              <a:rPr lang="en-US" sz="4000" b="1" dirty="0">
-                <a:solidFill>
-                  <a:srgbClr val="FFFFFF"/>
-                </a:solidFill>
-                <a:latin typeface="Calibri" pitchFamily="34" charset="0"/>
-                <a:ea typeface="Calibri" pitchFamily="34" charset="-122"/>
-                <a:cs typeface="Calibri" pitchFamily="34" charset="-120"/>
-              </a:rPr>
-              <a:t>AI je tu da vam pomogne!</a:t>
-            </a:r>
-            <a:endParaRPr lang="en-US" sz="4000" dirty="0"/>
-          </a:p>
-        </p:txBody>
-      </p:sp>
-      <p:sp>
-        <p:nvSpPr>
-          <p:cNvPr id="6" name="Text 3"/>
-          <p:cNvSpPr/>
-          <p:nvPr/>
-        </p:nvSpPr>
-        <p:spPr>
-          <a:xfrm>
-            <a:off x="914400" y="2331720"/>
-            <a:ext cx="7315200" cy="1005840"/>
-          </a:xfrm>
-          <a:prstGeom prst="rect">
-            <a:avLst/>
-          </a:prstGeom>
-          <a:noFill/>
-          <a:ln/>
-        </p:spPr>
-        <p:txBody>
-          <a:bodyPr wrap="square" rtlCol="0" anchor="ctr"/>
-          <a:lstStyle/>
-          <a:p>
-            <a:pPr marL="0" indent="0" algn="ctr">
-              <a:buNone/>
-            </a:pPr>
-            <a:r>
-              <a:rPr lang="en-US" sz="2000" i="1" dirty="0">
-                <a:solidFill>
-                  <a:srgbClr val="D6E8F7"/>
-                </a:solidFill>
-                <a:latin typeface="Calibri" pitchFamily="34" charset="0"/>
-                <a:ea typeface="Calibri" pitchFamily="34" charset="-122"/>
-                <a:cs typeface="Calibri" pitchFamily="34" charset="-120"/>
-              </a:rPr>
-              <a:t>Ne morate znati sve odjednom.</a:t>
-            </a:r>
-            <a:endParaRPr lang="en-US" sz="2000" dirty="0"/>
-          </a:p>
-          <a:p>
-            <a:pPr marL="0" indent="0" algn="ctr">
-              <a:buNone/>
-            </a:pPr>
-            <a:r>
-              <a:rPr lang="en-US" sz="2000" i="1" dirty="0">
-                <a:solidFill>
-                  <a:srgbClr val="D6E8F7"/>
-                </a:solidFill>
-                <a:latin typeface="Calibri" pitchFamily="34" charset="0"/>
-                <a:ea typeface="Calibri" pitchFamily="34" charset="-122"/>
-                <a:cs typeface="Calibri" pitchFamily="34" charset="-120"/>
-              </a:rPr>
-              <a:t>Pokušajte jedno pitanje danas — i vidite što se dogodi.</a:t>
-            </a:r>
-            <a:endParaRPr lang="en-US" sz="2000" dirty="0"/>
-          </a:p>
-        </p:txBody>
-      </p:sp>
-      <p:sp>
-        <p:nvSpPr>
-          <p:cNvPr id="7" name="Shape 4"/>
-          <p:cNvSpPr/>
-          <p:nvPr/>
-        </p:nvSpPr>
-        <p:spPr>
-          <a:xfrm>
-            <a:off x="2011680" y="3520440"/>
-            <a:ext cx="5120640" cy="868680"/>
-          </a:xfrm>
-          <a:prstGeom prst="rect">
-            <a:avLst/>
-          </a:prstGeom>
-          <a:solidFill>
-            <a:srgbClr val="E8A922"/>
-          </a:solidFill>
-          <a:ln w="12700">
-            <a:solidFill>
-              <a:srgbClr val="E8A922"/>
-            </a:solidFill>
-            <a:prstDash val="solid"/>
-          </a:ln>
-        </p:spPr>
-        <p:txBody>
-          <a:bodyPr/>
-          <a:lstStyle/>
-          <a:p>
-            <a:endParaRPr lang="en-US"/>
-          </a:p>
-        </p:txBody>
-      </p:sp>
-      <p:sp>
-        <p:nvSpPr>
-          <p:cNvPr id="8" name="Text 5"/>
-          <p:cNvSpPr/>
-          <p:nvPr/>
-        </p:nvSpPr>
-        <p:spPr>
-          <a:xfrm>
-            <a:off x="2011680" y="3566160"/>
-            <a:ext cx="5120640" cy="777240"/>
-          </a:xfrm>
-          <a:prstGeom prst="rect">
-            <a:avLst/>
-          </a:prstGeom>
-          <a:noFill/>
-          <a:ln/>
-        </p:spPr>
-        <p:txBody>
-          <a:bodyPr wrap="square" rtlCol="0" anchor="ctr"/>
-          <a:lstStyle/>
-          <a:p>
-            <a:pPr marL="0" indent="0" algn="ctr">
-              <a:buNone/>
-            </a:pPr>
-            <a:r>
-              <a:rPr lang="en-US" sz="2000" b="1" dirty="0">
-                <a:solidFill>
-                  <a:srgbClr val="1B3A5C"/>
-                </a:solidFill>
-                <a:latin typeface="Calibri" pitchFamily="34" charset="0"/>
-                <a:ea typeface="Calibri" pitchFamily="34" charset="-122"/>
-                <a:cs typeface="Calibri" pitchFamily="34" charset="-120"/>
-              </a:rPr>
-              <a:t>Probajte: chatgpt.com  ili  claude.ai</a:t>
-            </a:r>
-          </a:p>
-          <a:p>
-            <a:pPr marL="0" indent="0" algn="ctr">
-              <a:buNone/>
-            </a:pPr>
-            <a:r>
-              <a:rPr lang="en-US" sz="2000" b="1" dirty="0" err="1">
-                <a:solidFill>
-                  <a:srgbClr val="1B3A5C"/>
-                </a:solidFill>
-                <a:latin typeface="Calibri" pitchFamily="34" charset="0"/>
-                <a:ea typeface="Calibri" pitchFamily="34" charset="-122"/>
-                <a:cs typeface="Calibri" pitchFamily="34" charset="-120"/>
-              </a:rPr>
-              <a:t>Aplikacija</a:t>
-            </a:r>
-            <a:endParaRPr lang="en-US" sz="2000" dirty="0"/>
-          </a:p>
-        </p:txBody>
-      </p:sp>
-      <p:sp>
-        <p:nvSpPr>
-          <p:cNvPr id="9" name="Text 6"/>
-          <p:cNvSpPr/>
-          <p:nvPr/>
-        </p:nvSpPr>
-        <p:spPr>
-          <a:xfrm>
-            <a:off x="457200" y="4572000"/>
-            <a:ext cx="8229600" cy="457200"/>
-          </a:xfrm>
-          <a:prstGeom prst="rect">
-            <a:avLst/>
-          </a:prstGeom>
-          <a:noFill/>
-          <a:ln/>
-        </p:spPr>
-        <p:txBody>
-          <a:bodyPr wrap="square" rtlCol="0" anchor="ctr"/>
-          <a:lstStyle/>
-          <a:p>
-            <a:pPr marL="0" indent="0" algn="ctr">
-              <a:buNone/>
-            </a:pPr>
-            <a:r>
-              <a:rPr lang="en-US" sz="1600" dirty="0">
-                <a:solidFill>
-                  <a:srgbClr val="E8A922"/>
-                </a:solidFill>
-                <a:latin typeface="Calibri" pitchFamily="34" charset="0"/>
-                <a:ea typeface="Calibri" pitchFamily="34" charset="-122"/>
-                <a:cs typeface="Calibri" pitchFamily="34" charset="-120"/>
-              </a:rPr>
-              <a:t>Pitanja? Slobodno pitajte!</a:t>
-            </a:r>
-            <a:endParaRPr lang="en-US" sz="1600" dirty="0"/>
           </a:p>
         </p:txBody>
       </p:sp>
